--- a/CanvasNote_presentation.pptx
+++ b/CanvasNote_presentation.pptx
@@ -5,7 +5,7 @@
     <p:sldMasterId id="2147483648" r:id="rId1"/>
   </p:sldMasterIdLst>
   <p:notesMasterIdLst>
-    <p:notesMasterId r:id="rId11"/>
+    <p:notesMasterId r:id="rId12"/>
   </p:notesMasterIdLst>
   <p:sldIdLst>
     <p:sldId id="256" r:id="rId2"/>
@@ -16,7 +16,8 @@
     <p:sldId id="261" r:id="rId7"/>
     <p:sldId id="262" r:id="rId8"/>
     <p:sldId id="263" r:id="rId9"/>
-    <p:sldId id="264" r:id="rId10"/>
+    <p:sldId id="265" r:id="rId10"/>
+    <p:sldId id="264" r:id="rId11"/>
   </p:sldIdLst>
   <p:sldSz cx="9144000" cy="5143500" type="screen16x9"/>
   <p:notesSz cx="5143500" cy="9144000"/>
@@ -137,6 +138,7 @@
         </p14:section>
         <p14:section name="まとめ" id="{A6E49110-C9FF-6860-674C-493C7DE00F59}">
           <p14:sldIdLst>
+            <p14:sldId id="265"/>
             <p14:sldId id="264"/>
           </p14:sldIdLst>
         </p14:section>
@@ -320,7 +322,27 @@
           <a:p>
             <a:r>
               <a:rPr lang="en-US" dirty="0"/>
-              <a:t>皆さん、こんにちは。これから、授業の制作物として作成した「CanvasNote」について発表します。CanvasNoteは、教材・提出・クイズを一つにまとめた、先生と生徒のための教育支援Webアプリです。今日は、まず、なぜこのアプリを作ろうと思ったのかという背景からお話しして、次に、どんな機能があるのか、どんな技術で作ったのか、そして、現在どこまで完成しているのかを、順番にご紹介します。発表時間は10分ほどです。最後まで、よろしくお願いします。</a:t>
+              <a:t>皆さん、こんにちは。これから、授業の制作物として作成した「CanvasNote」について発表します。CanvasNoteは、教材・提出・クイズを一つにまとめた、先生と生徒のための教育支援Webアプリです。今日は、まず、なぜこのアプリを作ろうと思ったのかという背景からお話しして、次に、どんな機能があるのか、どんな技術で作ったのか、そして、</a:t>
+            </a:r>
+            <a:r>
+              <a:rPr lang="ja-JP" altLang="en-US" dirty="0"/>
+              <a:t>今後実装していきたい機能</a:t>
+            </a:r>
+            <a:r>
+              <a:rPr lang="en-US" dirty="0" err="1"/>
+              <a:t>を、順番にご紹介します</a:t>
+            </a:r>
+            <a:r>
+              <a:rPr lang="en-US" dirty="0"/>
+              <a:t>。</a:t>
+            </a:r>
+            <a:r>
+              <a:rPr lang="ja-JP" altLang="en-US"/>
+              <a:t>途中で簡単なデモを挟みます</a:t>
+            </a:r>
+            <a:r>
+              <a:rPr lang="en-US" dirty="0"/>
+              <a:t>。最後まで、よろしくお願いします。</a:t>
             </a:r>
           </a:p>
         </p:txBody>
@@ -343,6 +365,93 @@
             <a:fld id="{F7021451-1387-4CA6-816F-3879F97B5CBC}" type="slidenum">
               <a:rPr lang="en-US"/>
               <a:t>1</a:t>
+            </a:fld>
+            <a:endParaRPr lang="en-US"/>
+          </a:p>
+        </p:txBody>
+      </p:sp>
+    </p:spTree>
+    <p:extLst>
+      <p:ext uri="{BB962C8B-B14F-4D97-AF65-F5344CB8AC3E}">
+        <p14:creationId xmlns:p14="http://schemas.microsoft.com/office/powerpoint/2010/main" val="1024086991"/>
+      </p:ext>
+    </p:extLst>
+  </p:cSld>
+  <p:clrMapOvr>
+    <a:masterClrMapping/>
+  </p:clrMapOvr>
+</p:notes>
+</file>
+
+<file path=ppt/notesSlides/notesSlide10.xml><?xml version="1.0" encoding="utf-8"?>
+<p:notes xmlns:a="http://schemas.openxmlformats.org/drawingml/2006/main" xmlns:r="http://schemas.openxmlformats.org/officeDocument/2006/relationships" xmlns:p="http://schemas.openxmlformats.org/presentationml/2006/main">
+  <p:cSld>
+    <p:spTree>
+      <p:nvGrpSpPr>
+        <p:cNvPr id="1" name=""/>
+        <p:cNvGrpSpPr/>
+        <p:nvPr/>
+      </p:nvGrpSpPr>
+      <p:grpSpPr>
+        <a:xfrm>
+          <a:off x="0" y="0"/>
+          <a:ext cx="0" cy="0"/>
+          <a:chOff x="0" y="0"/>
+          <a:chExt cx="0" cy="0"/>
+        </a:xfrm>
+      </p:grpSpPr>
+      <p:sp>
+        <p:nvSpPr>
+          <p:cNvPr id="2" name="Slide Image Placeholder 1"/>
+          <p:cNvSpPr>
+            <a:spLocks noGrp="1" noRot="1" noChangeAspect="1"/>
+          </p:cNvSpPr>
+          <p:nvPr>
+            <p:ph type="sldImg"/>
+          </p:nvPr>
+        </p:nvSpPr>
+        <p:spPr/>
+      </p:sp>
+      <p:sp>
+        <p:nvSpPr>
+          <p:cNvPr id="3" name="Notes Placeholder 2"/>
+          <p:cNvSpPr>
+            <a:spLocks noGrp="1"/>
+          </p:cNvSpPr>
+          <p:nvPr>
+            <p:ph type="body" idx="1"/>
+          </p:nvPr>
+        </p:nvSpPr>
+        <p:spPr/>
+        <p:txBody>
+          <a:bodyPr/>
+          <a:lstStyle/>
+          <a:p>
+            <a:r>
+              <a:rPr lang="en-US" dirty="0"/>
+              <a:t>最後に、まとめです。CanvasNoteは、教材の作成と配布から、生徒の回答と提出、さらに、クイズの出題、自動採点、結果確認までを、一つにまとめた教育支援Webアプリです。特徴は3つあります。1つ目は、キャンバスで教材を作れること。2つ目は、教材・提出・クイズを一元管理できること。3つ目は、クラス単位で管理できることです。今後も、テストと改善を重ねて、実際の授業で使いやすいアプリに仕上げていきたいと思います。以上で発表を終わります。ご清聴ありがとうございました。ご質問があれば、お願いします。</a:t>
+            </a:r>
+          </a:p>
+        </p:txBody>
+      </p:sp>
+      <p:sp>
+        <p:nvSpPr>
+          <p:cNvPr id="4" name="Slide Number Placeholder 3"/>
+          <p:cNvSpPr>
+            <a:spLocks noGrp="1"/>
+          </p:cNvSpPr>
+          <p:nvPr>
+            <p:ph type="sldNum" sz="quarter" idx="10"/>
+          </p:nvPr>
+        </p:nvSpPr>
+        <p:spPr/>
+        <p:txBody>
+          <a:bodyPr/>
+          <a:lstStyle/>
+          <a:p>
+            <a:fld id="{F7021451-1387-4CA6-816F-3879F97B5CBC}" type="slidenum">
+              <a:rPr lang="en-US"/>
+              <a:t>10</a:t>
             </a:fld>
             <a:endParaRPr lang="en-US"/>
           </a:p>
@@ -1047,7 +1156,7 @@
     </p:spTree>
     <p:extLst>
       <p:ext uri="{BB962C8B-B14F-4D97-AF65-F5344CB8AC3E}">
-        <p14:creationId xmlns:p14="http://schemas.microsoft.com/office/powerpoint/2010/main" val="1024086991"/>
+        <p14:creationId xmlns:p14="http://schemas.microsoft.com/office/powerpoint/2010/main" val="2215671565"/>
       </p:ext>
     </p:extLst>
   </p:cSld>
@@ -2140,6 +2249,112 @@
               <a:t>クイズ</a:t>
             </a:r>
             <a:endParaRPr lang="en-US" sz="1400" dirty="0"/>
+          </a:p>
+        </p:txBody>
+      </p:sp>
+    </p:spTree>
+  </p:cSld>
+  <p:clrMapOvr>
+    <a:masterClrMapping/>
+  </p:clrMapOvr>
+</p:sld>
+</file>
+
+<file path=ppt/slides/slide10.xml><?xml version="1.0" encoding="utf-8"?>
+<p:sld xmlns:a="http://schemas.openxmlformats.org/drawingml/2006/main" xmlns:r="http://schemas.openxmlformats.org/officeDocument/2006/relationships" xmlns:p="http://schemas.openxmlformats.org/presentationml/2006/main">
+  <p:cSld name="Slide 9">
+    <p:spTree>
+      <p:nvGrpSpPr>
+        <p:cNvPr id="1" name=""/>
+        <p:cNvGrpSpPr/>
+        <p:nvPr/>
+      </p:nvGrpSpPr>
+      <p:grpSpPr>
+        <a:xfrm>
+          <a:off x="0" y="0"/>
+          <a:ext cx="0" cy="0"/>
+          <a:chOff x="0" y="0"/>
+          <a:chExt cx="0" cy="0"/>
+        </a:xfrm>
+      </p:grpSpPr>
+      <p:sp>
+        <p:nvSpPr>
+          <p:cNvPr id="17" name="thanks"/>
+          <p:cNvSpPr txBox="1"/>
+          <p:nvPr/>
+        </p:nvSpPr>
+        <p:spPr>
+          <a:xfrm>
+            <a:off x="673331" y="2366010"/>
+            <a:ext cx="8138160" cy="411480"/>
+          </a:xfrm>
+          <a:prstGeom prst="rect">
+            <a:avLst/>
+          </a:prstGeom>
+          <a:noFill/>
+          <a:ln/>
+        </p:spPr>
+        <p:txBody>
+          <a:bodyPr wrap="square" lIns="0" tIns="0" rIns="0" bIns="0" rtlCol="0" anchor="ctr"/>
+          <a:lstStyle/>
+          <a:p>
+            <a:pPr marL="0" indent="0" algn="l">
+              <a:buNone/>
+            </a:pPr>
+            <a:r>
+              <a:rPr lang="en-US" sz="4400" b="1" dirty="0">
+                <a:solidFill>
+                  <a:schemeClr val="accent2"/>
+                </a:solidFill>
+              </a:rPr>
+              <a:t>ご清聴ありがとうございました</a:t>
+            </a:r>
+            <a:endParaRPr lang="en-US" sz="4400" dirty="0"/>
+          </a:p>
+        </p:txBody>
+      </p:sp>
+      <p:sp>
+        <p:nvSpPr>
+          <p:cNvPr id="25" name="Slide Number Placeholder 0"/>
+          <p:cNvSpPr>
+            <a:spLocks noGrp="1"/>
+          </p:cNvSpPr>
+          <p:nvPr>
+            <p:ph type="sldNum" sz="quarter" idx="4294967295"/>
+          </p:nvPr>
+        </p:nvSpPr>
+        <p:spPr>
+          <a:xfrm>
+            <a:off x="8229600" y="4709160"/>
+            <a:ext cx="457200" cy="274320"/>
+          </a:xfrm>
+          <a:prstGeom prst="rect">
+            <a:avLst/>
+          </a:prstGeom>
+          <a:extLst>
+            <a:ext uri="{C572A759-6A51-4108-AA02-DFA0A04FC94B}">
+              <ma14:wrappingTextBoxFlag xmlns:ma14="http://schemas.microsoft.com/office/mac/drawingml/2011/main" xmlns="" val="0"/>
+            </a:ext>
+          </a:extLst>
+        </p:spPr>
+        <p:txBody>
+          <a:bodyPr/>
+          <a:lstStyle>
+            <a:lvl1pPr>
+              <a:defRPr sz="1000">
+                <a:solidFill>
+                  <a:schemeClr val="bg2"/>
+                </a:solidFill>
+              </a:defRPr>
+            </a:lvl1pPr>
+          </a:lstStyle>
+          <a:p>
+            <a:pPr algn="r"/>
+            <a:fld id="{F7021451-1387-4CA6-816F-3879F97B5CBC}" type="slidenum">
+              <a:rPr lang="en-US" b="0"/>
+              <a:t>10</a:t>
+            </a:fld>
+            <a:endParaRPr lang="en-US"/>
           </a:p>
         </p:txBody>
       </p:sp>
@@ -8963,7 +9178,7 @@
 
 <file path=ppt/slides/slide9.xml><?xml version="1.0" encoding="utf-8"?>
 <p:sld xmlns:a="http://schemas.openxmlformats.org/drawingml/2006/main" xmlns:r="http://schemas.openxmlformats.org/officeDocument/2006/relationships" xmlns:p="http://schemas.openxmlformats.org/presentationml/2006/main">
-  <p:cSld name="Slide 9">
+  <p:cSld>
     <p:spTree>
       <p:nvGrpSpPr>
         <p:cNvPr id="1" name=""/>
@@ -9454,42 +9669,6 @@
       </p:sp>
       <p:sp>
         <p:nvSpPr>
-          <p:cNvPr id="17" name="thanks"/>
-          <p:cNvSpPr txBox="1"/>
-          <p:nvPr/>
-        </p:nvSpPr>
-        <p:spPr>
-          <a:xfrm>
-            <a:off x="548640" y="4206240"/>
-            <a:ext cx="5486400" cy="411480"/>
-          </a:xfrm>
-          <a:prstGeom prst="rect">
-            <a:avLst/>
-          </a:prstGeom>
-          <a:noFill/>
-          <a:ln/>
-        </p:spPr>
-        <p:txBody>
-          <a:bodyPr wrap="square" lIns="0" tIns="0" rIns="0" bIns="0" rtlCol="0" anchor="ctr"/>
-          <a:lstStyle/>
-          <a:p>
-            <a:pPr marL="0" indent="0" algn="l">
-              <a:buNone/>
-            </a:pPr>
-            <a:r>
-              <a:rPr lang="en-US" sz="1800" b="1" dirty="0">
-                <a:solidFill>
-                  <a:schemeClr val="accent2"/>
-                </a:solidFill>
-              </a:rPr>
-              <a:t>ご清聴ありがとうございました</a:t>
-            </a:r>
-            <a:endParaRPr lang="en-US" sz="1800" dirty="0"/>
-          </a:p>
-        </p:txBody>
-      </p:sp>
-      <p:sp>
-        <p:nvSpPr>
           <p:cNvPr id="25" name="Slide Number Placeholder 0"/>
           <p:cNvSpPr>
             <a:spLocks noGrp="1"/>
@@ -9534,6 +9713,11 @@
         </p:txBody>
       </p:sp>
     </p:spTree>
+    <p:extLst>
+      <p:ext uri="{BB962C8B-B14F-4D97-AF65-F5344CB8AC3E}">
+        <p14:creationId xmlns:p14="http://schemas.microsoft.com/office/powerpoint/2010/main" val="2784547563"/>
+      </p:ext>
+    </p:extLst>
   </p:cSld>
   <p:clrMapOvr>
     <a:masterClrMapping/>
